--- a/idea_board_form_v3.pptx
+++ b/idea_board_form_v3.pptx
@@ -13808,7 +13808,7 @@
                 <a:ea typeface="Malgun Gothic"/>
                 <a:cs typeface="Malgun Gothic"/>
               </a:rPr>
-              <a:t>AI를 썼다면 사용 프로그램·활용한 부분을 작품 안에 명시했다</a:t>
+              <a:t>AI를 썼다면 영상 마지막(2~3초)에 사용 프로그램과 활용한 부분을 자막으로 넣었다(보드 AI 표와 같은 내용)</a:t>
             </a:r>
             <a:endParaRPr lang="ko-KR" altLang="en-US" sz="1000" b="0">
               <a:solidFill>
@@ -14651,7 +14651,7 @@
                 <a:ea typeface="Malgun Gothic"/>
                 <a:cs typeface="Malgun Gothic"/>
               </a:rPr>
-              <a:t>규정상 사용 프로그램과 활용한 부분을 작품 안에 명시해야 합니다. 영역마다 「사용 안 함」이 기본으로 들어 있으니, 쓴 영역만 「사용 프로그램」 칸에 도구 이름을, 「활용한 부분」 칸에 어느 부분인지(예: 13초~25초 장면, 대표 이미지, 배경음악 전체)를 적습니다. 어떻게 썼는지는 쓰지 않아도 됩니다. 한 영역에 도구가 둘이면 쉼표로 이어 씁니다.</a:t>
+              <a:t>규정상 사용 프로그램과 활용한 부분을 작품(영상)과 보드 모두에 명시해야 합니다. 보드에서는 영역마다 「사용 안 함」이 기본으로 들어 있으니, 쓴 영역만 「사용 프로그램」 칸에 도구 이름을, 「활용한 부분」 칸에 어느 부분인지(예: 13초~25초 장면, 대표 이미지, 배경음악 전체)를 적습니다. 영상에서는 마지막 2~3초에 같은 내용을 자막으로 넣습니다 — 예: 「AI 활용: Gemini(영상 장면 13~25초), ChatGPT(자막 문구)」. AI를 전혀 쓰지 않았으면 영상 자막은 필요 없고, 보드 표에는 「사용 안 함」을 그대로 둡니다. 어떻게 썼는지는 쓰지 않아도 되고, 한 영역에 도구가 둘이면 쉼표로 이어 씁니다.</a:t>
             </a:r>
             <a:endParaRPr lang="ko-KR" altLang="en-US" sz="1000" b="0">
               <a:solidFill>
